--- a/seminar updates.pptx
+++ b/seminar updates.pptx
@@ -10,8 +10,8 @@
   <p:sldIdLst>
     <p:sldId id="299" r:id="rId2"/>
     <p:sldId id="300" r:id="rId3"/>
-    <p:sldId id="302" r:id="rId4"/>
-    <p:sldId id="301" r:id="rId5"/>
+    <p:sldId id="301" r:id="rId4"/>
+    <p:sldId id="302" r:id="rId5"/>
     <p:sldId id="303" r:id="rId6"/>
   </p:sldIdLst>
   <p:sldSz cx="12192000" cy="6858000"/>
@@ -4219,223 +4219,6 @@
           <p:cNvPr id="2" name="Title 1">
             <a:extLst>
               <a:ext uri="{FF2B5EF4-FFF2-40B4-BE49-F238E27FC236}">
-                <a16:creationId xmlns:a16="http://schemas.microsoft.com/office/drawing/2014/main" id="{BA4760AD-EAFC-44F5-87CC-F70684B9312C}"/>
-              </a:ext>
-            </a:extLst>
-          </p:cNvPr>
-          <p:cNvSpPr>
-            <a:spLocks noGrp="1"/>
-          </p:cNvSpPr>
-          <p:nvPr>
-            <p:ph type="title"/>
-          </p:nvPr>
-        </p:nvSpPr>
-        <p:spPr/>
-        <p:txBody>
-          <a:bodyPr/>
-          <a:lstStyle/>
-          <a:p>
-            <a:r>
-              <a:rPr lang="en-US" dirty="0"/>
-              <a:t>Idea for an Alternative Start</a:t>
-            </a:r>
-            <a:endParaRPr lang="LID4096" dirty="0"/>
-          </a:p>
-        </p:txBody>
-      </p:sp>
-      <p:pic>
-        <p:nvPicPr>
-          <p:cNvPr id="6" name="Content Placeholder 5">
-            <a:extLst>
-              <a:ext uri="{FF2B5EF4-FFF2-40B4-BE49-F238E27FC236}">
-                <a16:creationId xmlns:a16="http://schemas.microsoft.com/office/drawing/2014/main" id="{7D19187A-6AF4-44FE-B7CB-D121431D5C8D}"/>
-              </a:ext>
-            </a:extLst>
-          </p:cNvPr>
-          <p:cNvPicPr>
-            <a:picLocks noGrp="1" noChangeAspect="1"/>
-          </p:cNvPicPr>
-          <p:nvPr>
-            <p:ph idx="1"/>
-          </p:nvPr>
-        </p:nvPicPr>
-        <p:blipFill>
-          <a:blip r:embed="rId2">
-            <a:extLst>
-              <a:ext uri="{28A0092B-C50C-407E-A947-70E740481C1C}">
-                <a14:useLocalDpi xmlns:a14="http://schemas.microsoft.com/office/drawing/2010/main" val="0"/>
-              </a:ext>
-            </a:extLst>
-          </a:blip>
-          <a:srcRect/>
-          <a:stretch/>
-        </p:blipFill>
-        <p:spPr>
-          <a:xfrm>
-            <a:off x="1014004" y="693506"/>
-            <a:ext cx="9189970" cy="6027969"/>
-          </a:xfrm>
-        </p:spPr>
-      </p:pic>
-      <p:sp>
-        <p:nvSpPr>
-          <p:cNvPr id="4" name="Slide Number Placeholder 3">
-            <a:extLst>
-              <a:ext uri="{FF2B5EF4-FFF2-40B4-BE49-F238E27FC236}">
-                <a16:creationId xmlns:a16="http://schemas.microsoft.com/office/drawing/2014/main" id="{F8414709-3D1D-4651-B744-DD3A4B10EBA5}"/>
-              </a:ext>
-            </a:extLst>
-          </p:cNvPr>
-          <p:cNvSpPr>
-            <a:spLocks noGrp="1"/>
-          </p:cNvSpPr>
-          <p:nvPr>
-            <p:ph type="sldNum" sz="quarter" idx="12"/>
-          </p:nvPr>
-        </p:nvSpPr>
-        <p:spPr/>
-        <p:txBody>
-          <a:bodyPr/>
-          <a:lstStyle/>
-          <a:p>
-            <a:fld id="{9F39E346-B1F3-4075-BD67-234EF0F10AC6}" type="slidenum">
-              <a:rPr lang="et-EE" smtClean="0"/>
-              <a:pPr/>
-              <a:t>3</a:t>
-            </a:fld>
-            <a:endParaRPr lang="et-EE" dirty="0"/>
-          </a:p>
-        </p:txBody>
-      </p:sp>
-      <p:sp>
-        <p:nvSpPr>
-          <p:cNvPr id="3" name="TextBox 2">
-            <a:extLst>
-              <a:ext uri="{FF2B5EF4-FFF2-40B4-BE49-F238E27FC236}">
-                <a16:creationId xmlns:a16="http://schemas.microsoft.com/office/drawing/2014/main" id="{E4163CBE-F93A-46EE-96CE-C31B121ED34D}"/>
-              </a:ext>
-            </a:extLst>
-          </p:cNvPr>
-          <p:cNvSpPr txBox="1"/>
-          <p:nvPr/>
-        </p:nvSpPr>
-        <p:spPr>
-          <a:xfrm>
-            <a:off x="7965742" y="973455"/>
-            <a:ext cx="4180765" cy="1938992"/>
-          </a:xfrm>
-          <a:prstGeom prst="rect">
-            <a:avLst/>
-          </a:prstGeom>
-          <a:noFill/>
-        </p:spPr>
-        <p:txBody>
-          <a:bodyPr wrap="square" rtlCol="0">
-            <a:spAutoFit/>
-          </a:bodyPr>
-          <a:lstStyle/>
-          <a:p>
-            <a:pPr marL="342900" indent="-342900" algn="l">
-              <a:buFont typeface="Arial" panose="020B0604020202020204" pitchFamily="34" charset="0"/>
-              <a:buChar char="•"/>
-            </a:pPr>
-            <a:r>
-              <a:rPr lang="en-US" sz="2000" dirty="0">
-                <a:solidFill>
-                  <a:srgbClr val="667982"/>
-                </a:solidFill>
-                <a:latin typeface="Arial" panose="020B0604020202020204" pitchFamily="34" charset="0"/>
-                <a:cs typeface="Arial" panose="020B0604020202020204" pitchFamily="34" charset="0"/>
-              </a:rPr>
-              <a:t>No PDH initially, even for the reference laser</a:t>
-            </a:r>
-          </a:p>
-          <a:p>
-            <a:pPr marL="342900" indent="-342900" algn="l">
-              <a:buFont typeface="Arial" panose="020B0604020202020204" pitchFamily="34" charset="0"/>
-              <a:buChar char="•"/>
-            </a:pPr>
-            <a:r>
-              <a:rPr lang="en-US" sz="2000" dirty="0">
-                <a:solidFill>
-                  <a:srgbClr val="667982"/>
-                </a:solidFill>
-                <a:latin typeface="Arial" panose="020B0604020202020204" pitchFamily="34" charset="0"/>
-                <a:cs typeface="Arial" panose="020B0604020202020204" pitchFamily="34" charset="0"/>
-              </a:rPr>
-              <a:t>Laser 1 locked to the reference via a </a:t>
-            </a:r>
-            <a:r>
-              <a:rPr lang="en-US" sz="2000" dirty="0" err="1">
-                <a:solidFill>
-                  <a:srgbClr val="667982"/>
-                </a:solidFill>
-                <a:latin typeface="Arial" panose="020B0604020202020204" pitchFamily="34" charset="0"/>
-                <a:cs typeface="Arial" panose="020B0604020202020204" pitchFamily="34" charset="0"/>
-              </a:rPr>
-              <a:t>Moku:Pro</a:t>
-            </a:r>
-            <a:endParaRPr lang="en-US" sz="2000" dirty="0">
-              <a:solidFill>
-                <a:srgbClr val="667982"/>
-              </a:solidFill>
-              <a:latin typeface="Arial" panose="020B0604020202020204" pitchFamily="34" charset="0"/>
-              <a:cs typeface="Arial" panose="020B0604020202020204" pitchFamily="34" charset="0"/>
-            </a:endParaRPr>
-          </a:p>
-          <a:p>
-            <a:pPr marL="342900" indent="-342900" algn="l">
-              <a:buFont typeface="Arial" panose="020B0604020202020204" pitchFamily="34" charset="0"/>
-              <a:buChar char="•"/>
-            </a:pPr>
-            <a:r>
-              <a:rPr lang="en-US" sz="2000" dirty="0">
-                <a:solidFill>
-                  <a:srgbClr val="667982"/>
-                </a:solidFill>
-                <a:latin typeface="Arial" panose="020B0604020202020204" pitchFamily="34" charset="0"/>
-                <a:cs typeface="Arial" panose="020B0604020202020204" pitchFamily="34" charset="0"/>
-              </a:rPr>
-              <a:t>Also (not shown), every thing would be fiber coupled</a:t>
-            </a:r>
-          </a:p>
-        </p:txBody>
-      </p:sp>
-    </p:spTree>
-    <p:extLst>
-      <p:ext uri="{BB962C8B-B14F-4D97-AF65-F5344CB8AC3E}">
-        <p14:creationId xmlns:p14="http://schemas.microsoft.com/office/powerpoint/2010/main" val="3289715251"/>
-      </p:ext>
-    </p:extLst>
-  </p:cSld>
-  <p:clrMapOvr>
-    <a:masterClrMapping/>
-  </p:clrMapOvr>
-</p:sld>
-</file>
-
-<file path=ppt/slides/slide4.xml><?xml version="1.0" encoding="utf-8"?>
-<p:sld xmlns:a="http://schemas.openxmlformats.org/drawingml/2006/main" xmlns:r="http://schemas.openxmlformats.org/officeDocument/2006/relationships" xmlns:p="http://schemas.openxmlformats.org/presentationml/2006/main">
-  <p:cSld>
-    <p:spTree>
-      <p:nvGrpSpPr>
-        <p:cNvPr id="1" name=""/>
-        <p:cNvGrpSpPr/>
-        <p:nvPr/>
-      </p:nvGrpSpPr>
-      <p:grpSpPr>
-        <a:xfrm>
-          <a:off x="0" y="0"/>
-          <a:ext cx="0" cy="0"/>
-          <a:chOff x="0" y="0"/>
-          <a:chExt cx="0" cy="0"/>
-        </a:xfrm>
-      </p:grpSpPr>
-      <p:sp>
-        <p:nvSpPr>
-          <p:cNvPr id="2" name="Title 1">
-            <a:extLst>
-              <a:ext uri="{FF2B5EF4-FFF2-40B4-BE49-F238E27FC236}">
                 <a16:creationId xmlns:a16="http://schemas.microsoft.com/office/drawing/2014/main" id="{A7F02049-D938-40C1-AEA6-173356418517}"/>
               </a:ext>
             </a:extLst>
@@ -4488,7 +4271,7 @@
             <a:fld id="{9F39E346-B1F3-4075-BD67-234EF0F10AC6}" type="slidenum">
               <a:rPr lang="et-EE" smtClean="0"/>
               <a:pPr/>
-              <a:t>4</a:t>
+              <a:t>3</a:t>
             </a:fld>
             <a:endParaRPr lang="et-EE" dirty="0"/>
           </a:p>
@@ -4559,8 +4342,8 @@
         </p:blipFill>
         <p:spPr>
           <a:xfrm>
-            <a:off x="5950423" y="136525"/>
-            <a:ext cx="6111785" cy="1223545"/>
+            <a:off x="5290639" y="136525"/>
+            <a:ext cx="6771569" cy="1355630"/>
           </a:xfrm>
         </p:spPr>
       </p:pic>
@@ -4568,6 +4351,223 @@
     <p:extLst>
       <p:ext uri="{BB962C8B-B14F-4D97-AF65-F5344CB8AC3E}">
         <p14:creationId xmlns:p14="http://schemas.microsoft.com/office/powerpoint/2010/main" val="3134978588"/>
+      </p:ext>
+    </p:extLst>
+  </p:cSld>
+  <p:clrMapOvr>
+    <a:masterClrMapping/>
+  </p:clrMapOvr>
+</p:sld>
+</file>
+
+<file path=ppt/slides/slide4.xml><?xml version="1.0" encoding="utf-8"?>
+<p:sld xmlns:a="http://schemas.openxmlformats.org/drawingml/2006/main" xmlns:r="http://schemas.openxmlformats.org/officeDocument/2006/relationships" xmlns:p="http://schemas.openxmlformats.org/presentationml/2006/main">
+  <p:cSld>
+    <p:spTree>
+      <p:nvGrpSpPr>
+        <p:cNvPr id="1" name=""/>
+        <p:cNvGrpSpPr/>
+        <p:nvPr/>
+      </p:nvGrpSpPr>
+      <p:grpSpPr>
+        <a:xfrm>
+          <a:off x="0" y="0"/>
+          <a:ext cx="0" cy="0"/>
+          <a:chOff x="0" y="0"/>
+          <a:chExt cx="0" cy="0"/>
+        </a:xfrm>
+      </p:grpSpPr>
+      <p:sp>
+        <p:nvSpPr>
+          <p:cNvPr id="2" name="Title 1">
+            <a:extLst>
+              <a:ext uri="{FF2B5EF4-FFF2-40B4-BE49-F238E27FC236}">
+                <a16:creationId xmlns:a16="http://schemas.microsoft.com/office/drawing/2014/main" id="{BA4760AD-EAFC-44F5-87CC-F70684B9312C}"/>
+              </a:ext>
+            </a:extLst>
+          </p:cNvPr>
+          <p:cNvSpPr>
+            <a:spLocks noGrp="1"/>
+          </p:cNvSpPr>
+          <p:nvPr>
+            <p:ph type="title"/>
+          </p:nvPr>
+        </p:nvSpPr>
+        <p:spPr/>
+        <p:txBody>
+          <a:bodyPr/>
+          <a:lstStyle/>
+          <a:p>
+            <a:r>
+              <a:rPr lang="en-US" dirty="0"/>
+              <a:t>Idea for an Alternative Start</a:t>
+            </a:r>
+            <a:endParaRPr lang="LID4096" dirty="0"/>
+          </a:p>
+        </p:txBody>
+      </p:sp>
+      <p:pic>
+        <p:nvPicPr>
+          <p:cNvPr id="6" name="Content Placeholder 5">
+            <a:extLst>
+              <a:ext uri="{FF2B5EF4-FFF2-40B4-BE49-F238E27FC236}">
+                <a16:creationId xmlns:a16="http://schemas.microsoft.com/office/drawing/2014/main" id="{7D19187A-6AF4-44FE-B7CB-D121431D5C8D}"/>
+              </a:ext>
+            </a:extLst>
+          </p:cNvPr>
+          <p:cNvPicPr>
+            <a:picLocks noGrp="1" noChangeAspect="1"/>
+          </p:cNvPicPr>
+          <p:nvPr>
+            <p:ph idx="1"/>
+          </p:nvPr>
+        </p:nvPicPr>
+        <p:blipFill>
+          <a:blip r:embed="rId2">
+            <a:extLst>
+              <a:ext uri="{28A0092B-C50C-407E-A947-70E740481C1C}">
+                <a14:useLocalDpi xmlns:a14="http://schemas.microsoft.com/office/drawing/2010/main" val="0"/>
+              </a:ext>
+            </a:extLst>
+          </a:blip>
+          <a:srcRect/>
+          <a:stretch/>
+        </p:blipFill>
+        <p:spPr>
+          <a:xfrm>
+            <a:off x="1014004" y="693506"/>
+            <a:ext cx="9189970" cy="6027969"/>
+          </a:xfrm>
+        </p:spPr>
+      </p:pic>
+      <p:sp>
+        <p:nvSpPr>
+          <p:cNvPr id="4" name="Slide Number Placeholder 3">
+            <a:extLst>
+              <a:ext uri="{FF2B5EF4-FFF2-40B4-BE49-F238E27FC236}">
+                <a16:creationId xmlns:a16="http://schemas.microsoft.com/office/drawing/2014/main" id="{F8414709-3D1D-4651-B744-DD3A4B10EBA5}"/>
+              </a:ext>
+            </a:extLst>
+          </p:cNvPr>
+          <p:cNvSpPr>
+            <a:spLocks noGrp="1"/>
+          </p:cNvSpPr>
+          <p:nvPr>
+            <p:ph type="sldNum" sz="quarter" idx="12"/>
+          </p:nvPr>
+        </p:nvSpPr>
+        <p:spPr/>
+        <p:txBody>
+          <a:bodyPr/>
+          <a:lstStyle/>
+          <a:p>
+            <a:fld id="{9F39E346-B1F3-4075-BD67-234EF0F10AC6}" type="slidenum">
+              <a:rPr lang="et-EE" smtClean="0"/>
+              <a:pPr/>
+              <a:t>4</a:t>
+            </a:fld>
+            <a:endParaRPr lang="et-EE" dirty="0"/>
+          </a:p>
+        </p:txBody>
+      </p:sp>
+      <p:sp>
+        <p:nvSpPr>
+          <p:cNvPr id="3" name="TextBox 2">
+            <a:extLst>
+              <a:ext uri="{FF2B5EF4-FFF2-40B4-BE49-F238E27FC236}">
+                <a16:creationId xmlns:a16="http://schemas.microsoft.com/office/drawing/2014/main" id="{E4163CBE-F93A-46EE-96CE-C31B121ED34D}"/>
+              </a:ext>
+            </a:extLst>
+          </p:cNvPr>
+          <p:cNvSpPr txBox="1"/>
+          <p:nvPr/>
+        </p:nvSpPr>
+        <p:spPr>
+          <a:xfrm>
+            <a:off x="7692788" y="973455"/>
+            <a:ext cx="4453719" cy="1938992"/>
+          </a:xfrm>
+          <a:prstGeom prst="rect">
+            <a:avLst/>
+          </a:prstGeom>
+          <a:noFill/>
+        </p:spPr>
+        <p:txBody>
+          <a:bodyPr wrap="square" rtlCol="0">
+            <a:spAutoFit/>
+          </a:bodyPr>
+          <a:lstStyle/>
+          <a:p>
+            <a:pPr marL="342900" indent="-342900" algn="l">
+              <a:buFont typeface="Arial" panose="020B0604020202020204" pitchFamily="34" charset="0"/>
+              <a:buChar char="•"/>
+            </a:pPr>
+            <a:r>
+              <a:rPr lang="en-US" sz="2000" dirty="0">
+                <a:solidFill>
+                  <a:srgbClr val="667982"/>
+                </a:solidFill>
+                <a:latin typeface="Arial" panose="020B0604020202020204" pitchFamily="34" charset="0"/>
+                <a:cs typeface="Arial" panose="020B0604020202020204" pitchFamily="34" charset="0"/>
+              </a:rPr>
+              <a:t>No PDH initially, even for the reference laser</a:t>
+            </a:r>
+          </a:p>
+          <a:p>
+            <a:pPr marL="342900" indent="-342900" algn="l">
+              <a:buFont typeface="Arial" panose="020B0604020202020204" pitchFamily="34" charset="0"/>
+              <a:buChar char="•"/>
+            </a:pPr>
+            <a:r>
+              <a:rPr lang="en-US" sz="2000" dirty="0">
+                <a:solidFill>
+                  <a:srgbClr val="667982"/>
+                </a:solidFill>
+                <a:latin typeface="Arial" panose="020B0604020202020204" pitchFamily="34" charset="0"/>
+                <a:cs typeface="Arial" panose="020B0604020202020204" pitchFamily="34" charset="0"/>
+              </a:rPr>
+              <a:t>Laser 1 locked to the reference via a </a:t>
+            </a:r>
+            <a:r>
+              <a:rPr lang="en-US" sz="2000" dirty="0" err="1">
+                <a:solidFill>
+                  <a:srgbClr val="667982"/>
+                </a:solidFill>
+                <a:latin typeface="Arial" panose="020B0604020202020204" pitchFamily="34" charset="0"/>
+                <a:cs typeface="Arial" panose="020B0604020202020204" pitchFamily="34" charset="0"/>
+              </a:rPr>
+              <a:t>Moku:Pro</a:t>
+            </a:r>
+            <a:endParaRPr lang="en-US" sz="2000" dirty="0">
+              <a:solidFill>
+                <a:srgbClr val="667982"/>
+              </a:solidFill>
+              <a:latin typeface="Arial" panose="020B0604020202020204" pitchFamily="34" charset="0"/>
+              <a:cs typeface="Arial" panose="020B0604020202020204" pitchFamily="34" charset="0"/>
+            </a:endParaRPr>
+          </a:p>
+          <a:p>
+            <a:pPr marL="342900" indent="-342900" algn="l">
+              <a:buFont typeface="Arial" panose="020B0604020202020204" pitchFamily="34" charset="0"/>
+              <a:buChar char="•"/>
+            </a:pPr>
+            <a:r>
+              <a:rPr lang="en-US" sz="2000" dirty="0">
+                <a:solidFill>
+                  <a:srgbClr val="667982"/>
+                </a:solidFill>
+                <a:latin typeface="Arial" panose="020B0604020202020204" pitchFamily="34" charset="0"/>
+                <a:cs typeface="Arial" panose="020B0604020202020204" pitchFamily="34" charset="0"/>
+              </a:rPr>
+              <a:t>Also (not shown), everything would be fiber coupled</a:t>
+            </a:r>
+          </a:p>
+        </p:txBody>
+      </p:sp>
+    </p:spTree>
+    <p:extLst>
+      <p:ext uri="{BB962C8B-B14F-4D97-AF65-F5344CB8AC3E}">
+        <p14:creationId xmlns:p14="http://schemas.microsoft.com/office/powerpoint/2010/main" val="3289715251"/>
       </p:ext>
     </p:extLst>
   </p:cSld>

--- a/seminar updates.pptx
+++ b/seminar updates.pptx
@@ -5,8 +5,14 @@
     <p:sldMasterId id="2147483708" r:id="rId1"/>
   </p:sldMasterIdLst>
   <p:notesMasterIdLst>
-    <p:notesMasterId r:id="rId2"/>
+    <p:notesMasterId r:id="rId6"/>
   </p:notesMasterIdLst>
+  <p:sldIdLst>
+    <p:sldId id="256" r:id="rId2"/>
+    <p:sldId id="257" r:id="rId3"/>
+    <p:sldId id="258" r:id="rId4"/>
+    <p:sldId id="259" r:id="rId5"/>
+  </p:sldIdLst>
   <p:sldSz cx="12192000" cy="6858000"/>
   <p:notesSz cx="6858000" cy="9144000"/>
   <p:defaultTextStyle>
@@ -3735,6 +3741,650 @@
     </p:otherStyle>
   </p:txStyles>
 </p:sldMaster>
+</file>
+
+<file path=ppt/slides/slide1.xml><?xml version="1.0" encoding="utf-8"?>
+<p:sld xmlns:a="http://schemas.openxmlformats.org/drawingml/2006/main" xmlns:r="http://schemas.openxmlformats.org/officeDocument/2006/relationships" xmlns:p="http://schemas.openxmlformats.org/presentationml/2006/main">
+  <p:cSld>
+    <p:spTree>
+      <p:nvGrpSpPr>
+        <p:cNvPr id="1" name=""/>
+        <p:cNvGrpSpPr/>
+        <p:nvPr/>
+      </p:nvGrpSpPr>
+      <p:grpSpPr>
+        <a:xfrm>
+          <a:off x="0" y="0"/>
+          <a:ext cx="0" cy="0"/>
+          <a:chOff x="0" y="0"/>
+          <a:chExt cx="0" cy="0"/>
+        </a:xfrm>
+      </p:grpSpPr>
+      <p:sp>
+        <p:nvSpPr>
+          <p:cNvPr id="4" name="Slide Number Placeholder 3">
+            <a:extLst>
+              <a:ext uri="{FF2B5EF4-FFF2-40B4-BE49-F238E27FC236}">
+                <a16:creationId xmlns:a16="http://schemas.microsoft.com/office/drawing/2014/main" id="{CCDBECE5-E798-5F3F-ECFF-16EE24DEA267}"/>
+              </a:ext>
+            </a:extLst>
+          </p:cNvPr>
+          <p:cNvSpPr>
+            <a:spLocks noGrp="1"/>
+          </p:cNvSpPr>
+          <p:nvPr>
+            <p:ph type="sldNum" sz="quarter" idx="12"/>
+          </p:nvPr>
+        </p:nvSpPr>
+        <p:spPr/>
+        <p:txBody>
+          <a:bodyPr/>
+          <a:lstStyle/>
+          <a:p>
+            <a:fld id="{9F39E346-B1F3-4075-BD67-234EF0F10AC6}" type="slidenum">
+              <a:rPr lang="et-EE" smtClean="0"/>
+              <a:pPr/>
+              <a:t>1</a:t>
+            </a:fld>
+            <a:endParaRPr lang="et-EE" dirty="0"/>
+          </a:p>
+        </p:txBody>
+      </p:sp>
+      <p:pic>
+        <p:nvPicPr>
+          <p:cNvPr id="6" name="Picture 5" descr="A screenshot of a computer program&#10;&#10;AI-generated content may be incorrect.">
+            <a:extLst>
+              <a:ext uri="{FF2B5EF4-FFF2-40B4-BE49-F238E27FC236}">
+                <a16:creationId xmlns:a16="http://schemas.microsoft.com/office/drawing/2014/main" id="{8B7438EC-F24A-ABAE-7197-BDA7F50912FC}"/>
+              </a:ext>
+            </a:extLst>
+          </p:cNvPr>
+          <p:cNvPicPr>
+            <a:picLocks noChangeAspect="1"/>
+          </p:cNvPicPr>
+          <p:nvPr/>
+        </p:nvPicPr>
+        <p:blipFill>
+          <a:blip r:embed="rId2">
+            <a:extLst>
+              <a:ext uri="{28A0092B-C50C-407E-A947-70E740481C1C}">
+                <a14:useLocalDpi xmlns:a14="http://schemas.microsoft.com/office/drawing/2010/main" val="0"/>
+              </a:ext>
+            </a:extLst>
+          </a:blip>
+          <a:stretch>
+            <a:fillRect/>
+          </a:stretch>
+        </p:blipFill>
+        <p:spPr>
+          <a:xfrm>
+            <a:off x="1807535" y="647553"/>
+            <a:ext cx="9114769" cy="5978642"/>
+          </a:xfrm>
+          <a:prstGeom prst="rect">
+            <a:avLst/>
+          </a:prstGeom>
+        </p:spPr>
+      </p:pic>
+    </p:spTree>
+    <p:extLst>
+      <p:ext uri="{BB962C8B-B14F-4D97-AF65-F5344CB8AC3E}">
+        <p14:creationId xmlns:p14="http://schemas.microsoft.com/office/powerpoint/2010/main" val="2453448810"/>
+      </p:ext>
+    </p:extLst>
+  </p:cSld>
+  <p:clrMapOvr>
+    <a:masterClrMapping/>
+  </p:clrMapOvr>
+</p:sld>
+</file>
+
+<file path=ppt/slides/slide2.xml><?xml version="1.0" encoding="utf-8"?>
+<p:sld xmlns:a="http://schemas.openxmlformats.org/drawingml/2006/main" xmlns:r="http://schemas.openxmlformats.org/officeDocument/2006/relationships" xmlns:p="http://schemas.openxmlformats.org/presentationml/2006/main">
+  <p:cSld>
+    <p:spTree>
+      <p:nvGrpSpPr>
+        <p:cNvPr id="1" name=""/>
+        <p:cNvGrpSpPr/>
+        <p:nvPr/>
+      </p:nvGrpSpPr>
+      <p:grpSpPr>
+        <a:xfrm>
+          <a:off x="0" y="0"/>
+          <a:ext cx="0" cy="0"/>
+          <a:chOff x="0" y="0"/>
+          <a:chExt cx="0" cy="0"/>
+        </a:xfrm>
+      </p:grpSpPr>
+      <p:sp>
+        <p:nvSpPr>
+          <p:cNvPr id="2" name="Slide Number Placeholder 1">
+            <a:extLst>
+              <a:ext uri="{FF2B5EF4-FFF2-40B4-BE49-F238E27FC236}">
+                <a16:creationId xmlns:a16="http://schemas.microsoft.com/office/drawing/2014/main" id="{3B3E9526-D0DF-54D2-EBBE-DA2A0502AA9E}"/>
+              </a:ext>
+            </a:extLst>
+          </p:cNvPr>
+          <p:cNvSpPr>
+            <a:spLocks noGrp="1"/>
+          </p:cNvSpPr>
+          <p:nvPr>
+            <p:ph type="sldNum" sz="quarter" idx="12"/>
+          </p:nvPr>
+        </p:nvSpPr>
+        <p:spPr/>
+        <p:txBody>
+          <a:bodyPr/>
+          <a:lstStyle/>
+          <a:p>
+            <a:fld id="{9F39E346-B1F3-4075-BD67-234EF0F10AC6}" type="slidenum">
+              <a:rPr lang="et-EE" smtClean="0"/>
+              <a:t>2</a:t>
+            </a:fld>
+            <a:endParaRPr lang="et-EE"/>
+          </a:p>
+        </p:txBody>
+      </p:sp>
+      <p:pic>
+        <p:nvPicPr>
+          <p:cNvPr id="4" name="Picture 3" descr="A screenshot of a computer&#10;&#10;AI-generated content may be incorrect.">
+            <a:extLst>
+              <a:ext uri="{FF2B5EF4-FFF2-40B4-BE49-F238E27FC236}">
+                <a16:creationId xmlns:a16="http://schemas.microsoft.com/office/drawing/2014/main" id="{3989B6E6-219F-ECA5-9905-AD018CD0B7BE}"/>
+              </a:ext>
+            </a:extLst>
+          </p:cNvPr>
+          <p:cNvPicPr>
+            <a:picLocks noChangeAspect="1"/>
+          </p:cNvPicPr>
+          <p:nvPr/>
+        </p:nvPicPr>
+        <p:blipFill>
+          <a:blip r:embed="rId2">
+            <a:extLst>
+              <a:ext uri="{28A0092B-C50C-407E-A947-70E740481C1C}">
+                <a14:useLocalDpi xmlns:a14="http://schemas.microsoft.com/office/drawing/2010/main" val="0"/>
+              </a:ext>
+            </a:extLst>
+          </a:blip>
+          <a:stretch>
+            <a:fillRect/>
+          </a:stretch>
+        </p:blipFill>
+        <p:spPr>
+          <a:xfrm>
+            <a:off x="1371600" y="330128"/>
+            <a:ext cx="9282223" cy="6088480"/>
+          </a:xfrm>
+          <a:prstGeom prst="rect">
+            <a:avLst/>
+          </a:prstGeom>
+        </p:spPr>
+      </p:pic>
+    </p:spTree>
+    <p:extLst>
+      <p:ext uri="{BB962C8B-B14F-4D97-AF65-F5344CB8AC3E}">
+        <p14:creationId xmlns:p14="http://schemas.microsoft.com/office/powerpoint/2010/main" val="1688866417"/>
+      </p:ext>
+    </p:extLst>
+  </p:cSld>
+  <p:clrMapOvr>
+    <a:masterClrMapping/>
+  </p:clrMapOvr>
+</p:sld>
+</file>
+
+<file path=ppt/slides/slide3.xml><?xml version="1.0" encoding="utf-8"?>
+<p:sld xmlns:a="http://schemas.openxmlformats.org/drawingml/2006/main" xmlns:r="http://schemas.openxmlformats.org/officeDocument/2006/relationships" xmlns:p="http://schemas.openxmlformats.org/presentationml/2006/main">
+  <p:cSld>
+    <p:spTree>
+      <p:nvGrpSpPr>
+        <p:cNvPr id="1" name=""/>
+        <p:cNvGrpSpPr/>
+        <p:nvPr/>
+      </p:nvGrpSpPr>
+      <p:grpSpPr>
+        <a:xfrm>
+          <a:off x="0" y="0"/>
+          <a:ext cx="0" cy="0"/>
+          <a:chOff x="0" y="0"/>
+          <a:chExt cx="0" cy="0"/>
+        </a:xfrm>
+      </p:grpSpPr>
+      <p:sp>
+        <p:nvSpPr>
+          <p:cNvPr id="2" name="Title 1">
+            <a:extLst>
+              <a:ext uri="{FF2B5EF4-FFF2-40B4-BE49-F238E27FC236}">
+                <a16:creationId xmlns:a16="http://schemas.microsoft.com/office/drawing/2014/main" id="{26F3D5E9-ADA9-759F-189D-EB3EE890F26B}"/>
+              </a:ext>
+            </a:extLst>
+          </p:cNvPr>
+          <p:cNvSpPr>
+            <a:spLocks noGrp="1"/>
+          </p:cNvSpPr>
+          <p:nvPr>
+            <p:ph type="title"/>
+          </p:nvPr>
+        </p:nvSpPr>
+        <p:spPr/>
+        <p:txBody>
+          <a:bodyPr/>
+          <a:lstStyle/>
+          <a:p>
+            <a:r>
+              <a:rPr lang="en-US" dirty="0"/>
+              <a:t>Laser Quotes</a:t>
+            </a:r>
+            <a:endParaRPr lang="et-EE" dirty="0"/>
+          </a:p>
+        </p:txBody>
+      </p:sp>
+      <p:sp>
+        <p:nvSpPr>
+          <p:cNvPr id="4" name="Slide Number Placeholder 3">
+            <a:extLst>
+              <a:ext uri="{FF2B5EF4-FFF2-40B4-BE49-F238E27FC236}">
+                <a16:creationId xmlns:a16="http://schemas.microsoft.com/office/drawing/2014/main" id="{A576601E-F350-2640-0FA0-A078C1F38AAC}"/>
+              </a:ext>
+            </a:extLst>
+          </p:cNvPr>
+          <p:cNvSpPr>
+            <a:spLocks noGrp="1"/>
+          </p:cNvSpPr>
+          <p:nvPr>
+            <p:ph type="sldNum" sz="quarter" idx="12"/>
+          </p:nvPr>
+        </p:nvSpPr>
+        <p:spPr/>
+        <p:txBody>
+          <a:bodyPr/>
+          <a:lstStyle/>
+          <a:p>
+            <a:fld id="{9F39E346-B1F3-4075-BD67-234EF0F10AC6}" type="slidenum">
+              <a:rPr lang="et-EE" smtClean="0"/>
+              <a:pPr/>
+              <a:t>3</a:t>
+            </a:fld>
+            <a:endParaRPr lang="et-EE" dirty="0"/>
+          </a:p>
+        </p:txBody>
+      </p:sp>
+      <p:pic>
+        <p:nvPicPr>
+          <p:cNvPr id="8" name="Picture 7" descr="A screenshot of a computer&#10;&#10;AI-generated content may be incorrect.">
+            <a:extLst>
+              <a:ext uri="{FF2B5EF4-FFF2-40B4-BE49-F238E27FC236}">
+                <a16:creationId xmlns:a16="http://schemas.microsoft.com/office/drawing/2014/main" id="{21F0C02C-92AA-1447-84E9-F8DC69B1D25C}"/>
+              </a:ext>
+            </a:extLst>
+          </p:cNvPr>
+          <p:cNvPicPr>
+            <a:picLocks noChangeAspect="1"/>
+          </p:cNvPicPr>
+          <p:nvPr/>
+        </p:nvPicPr>
+        <p:blipFill>
+          <a:blip r:embed="rId2">
+            <a:extLst>
+              <a:ext uri="{28A0092B-C50C-407E-A947-70E740481C1C}">
+                <a14:useLocalDpi xmlns:a14="http://schemas.microsoft.com/office/drawing/2010/main" val="0"/>
+              </a:ext>
+            </a:extLst>
+          </a:blip>
+          <a:stretch>
+            <a:fillRect/>
+          </a:stretch>
+        </p:blipFill>
+        <p:spPr>
+          <a:xfrm>
+            <a:off x="863555" y="1914697"/>
+            <a:ext cx="10464890" cy="1831635"/>
+          </a:xfrm>
+          <a:prstGeom prst="rect">
+            <a:avLst/>
+          </a:prstGeom>
+        </p:spPr>
+      </p:pic>
+      <p:sp>
+        <p:nvSpPr>
+          <p:cNvPr id="9" name="Rectangle 8">
+            <a:extLst>
+              <a:ext uri="{FF2B5EF4-FFF2-40B4-BE49-F238E27FC236}">
+                <a16:creationId xmlns:a16="http://schemas.microsoft.com/office/drawing/2014/main" id="{8E370413-21C5-3F61-E434-B4E888C12B0F}"/>
+              </a:ext>
+            </a:extLst>
+          </p:cNvPr>
+          <p:cNvSpPr/>
+          <p:nvPr/>
+        </p:nvSpPr>
+        <p:spPr>
+          <a:xfrm>
+            <a:off x="863555" y="2733152"/>
+            <a:ext cx="1507856" cy="361740"/>
+          </a:xfrm>
+          <a:prstGeom prst="rect">
+            <a:avLst/>
+          </a:prstGeom>
+          <a:noFill/>
+          <a:ln w="38100">
+            <a:solidFill>
+              <a:srgbClr val="C00000"/>
+            </a:solidFill>
+          </a:ln>
+        </p:spPr>
+        <p:style>
+          <a:lnRef idx="2">
+            <a:schemeClr val="accent1">
+              <a:shade val="15000"/>
+            </a:schemeClr>
+          </a:lnRef>
+          <a:fillRef idx="1">
+            <a:schemeClr val="accent1"/>
+          </a:fillRef>
+          <a:effectRef idx="0">
+            <a:schemeClr val="accent1"/>
+          </a:effectRef>
+          <a:fontRef idx="minor">
+            <a:schemeClr val="lt1"/>
+          </a:fontRef>
+        </p:style>
+        <p:txBody>
+          <a:bodyPr rtlCol="0" anchor="ctr"/>
+          <a:lstStyle/>
+          <a:p>
+            <a:pPr algn="ctr"/>
+            <a:endParaRPr lang="et-EE"/>
+          </a:p>
+        </p:txBody>
+      </p:sp>
+    </p:spTree>
+    <p:extLst>
+      <p:ext uri="{BB962C8B-B14F-4D97-AF65-F5344CB8AC3E}">
+        <p14:creationId xmlns:p14="http://schemas.microsoft.com/office/powerpoint/2010/main" val="448181498"/>
+      </p:ext>
+    </p:extLst>
+  </p:cSld>
+  <p:clrMapOvr>
+    <a:masterClrMapping/>
+  </p:clrMapOvr>
+</p:sld>
+</file>
+
+<file path=ppt/slides/slide4.xml><?xml version="1.0" encoding="utf-8"?>
+<p:sld xmlns:a="http://schemas.openxmlformats.org/drawingml/2006/main" xmlns:r="http://schemas.openxmlformats.org/officeDocument/2006/relationships" xmlns:p="http://schemas.openxmlformats.org/presentationml/2006/main">
+  <p:cSld>
+    <p:spTree>
+      <p:nvGrpSpPr>
+        <p:cNvPr id="1" name=""/>
+        <p:cNvGrpSpPr/>
+        <p:nvPr/>
+      </p:nvGrpSpPr>
+      <p:grpSpPr>
+        <a:xfrm>
+          <a:off x="0" y="0"/>
+          <a:ext cx="0" cy="0"/>
+          <a:chOff x="0" y="0"/>
+          <a:chExt cx="0" cy="0"/>
+        </a:xfrm>
+      </p:grpSpPr>
+      <p:sp>
+        <p:nvSpPr>
+          <p:cNvPr id="2" name="Title 1">
+            <a:extLst>
+              <a:ext uri="{FF2B5EF4-FFF2-40B4-BE49-F238E27FC236}">
+                <a16:creationId xmlns:a16="http://schemas.microsoft.com/office/drawing/2014/main" id="{A3CAFE11-0F7B-DCC4-9DCE-9EF4E0ACFCE8}"/>
+              </a:ext>
+            </a:extLst>
+          </p:cNvPr>
+          <p:cNvSpPr>
+            <a:spLocks noGrp="1"/>
+          </p:cNvSpPr>
+          <p:nvPr>
+            <p:ph type="title"/>
+          </p:nvPr>
+        </p:nvSpPr>
+        <p:spPr/>
+        <p:txBody>
+          <a:bodyPr/>
+          <a:lstStyle/>
+          <a:p>
+            <a:r>
+              <a:rPr lang="en-US" dirty="0"/>
+              <a:t>Room Layout</a:t>
+            </a:r>
+            <a:endParaRPr lang="et-EE" dirty="0"/>
+          </a:p>
+        </p:txBody>
+      </p:sp>
+      <p:sp>
+        <p:nvSpPr>
+          <p:cNvPr id="3" name="Content Placeholder 2">
+            <a:extLst>
+              <a:ext uri="{FF2B5EF4-FFF2-40B4-BE49-F238E27FC236}">
+                <a16:creationId xmlns:a16="http://schemas.microsoft.com/office/drawing/2014/main" id="{80194374-ED4D-073E-6C54-90D389DC7109}"/>
+              </a:ext>
+            </a:extLst>
+          </p:cNvPr>
+          <p:cNvSpPr>
+            <a:spLocks noGrp="1"/>
+          </p:cNvSpPr>
+          <p:nvPr>
+            <p:ph idx="1"/>
+          </p:nvPr>
+        </p:nvSpPr>
+        <p:spPr>
+          <a:xfrm>
+            <a:off x="224442" y="1446414"/>
+            <a:ext cx="11626343" cy="4365423"/>
+          </a:xfrm>
+        </p:spPr>
+        <p:txBody>
+          <a:bodyPr/>
+          <a:lstStyle/>
+          <a:p>
+            <a:r>
+              <a:rPr lang="et-EE" dirty="0"/>
+              <a:t>T1220C – </a:t>
+            </a:r>
+            <a:r>
+              <a:rPr lang="en-US" dirty="0"/>
+              <a:t>Thorlabs </a:t>
+            </a:r>
+            <a:r>
+              <a:rPr lang="et-EE" dirty="0" err="1"/>
+              <a:t>Nexus</a:t>
+            </a:r>
+            <a:r>
+              <a:rPr lang="et-EE" dirty="0"/>
+              <a:t> </a:t>
+            </a:r>
+            <a:r>
+              <a:rPr lang="et-EE" dirty="0" err="1"/>
+              <a:t>Optical</a:t>
+            </a:r>
+            <a:r>
+              <a:rPr lang="et-EE" dirty="0"/>
+              <a:t> </a:t>
+            </a:r>
+            <a:r>
+              <a:rPr lang="et-EE" dirty="0" err="1"/>
+              <a:t>Table</a:t>
+            </a:r>
+            <a:r>
+              <a:rPr lang="et-EE" dirty="0"/>
+              <a:t>, 1.2 m x 2 m x 210 mm</a:t>
+            </a:r>
+            <a:r>
+              <a:rPr lang="en-US" dirty="0"/>
+              <a:t> (4152 EUR)</a:t>
+            </a:r>
+          </a:p>
+          <a:p>
+            <a:r>
+              <a:rPr lang="en-US" dirty="0"/>
+              <a:t>PTS603 - Thorlabs Active Legs, 700 mm (3356 EUR)</a:t>
+            </a:r>
+          </a:p>
+          <a:p>
+            <a:r>
+              <a:rPr lang="en-US" dirty="0"/>
+              <a:t>Where should the </a:t>
+            </a:r>
+            <a:br>
+              <a:rPr lang="en-US" dirty="0"/>
+            </a:br>
+            <a:r>
+              <a:rPr lang="en-US" dirty="0"/>
+              <a:t>vacuum tank go?</a:t>
+            </a:r>
+          </a:p>
+          <a:p>
+            <a:pPr marL="0" indent="0">
+              <a:buNone/>
+            </a:pPr>
+            <a:endParaRPr lang="en-US" dirty="0"/>
+          </a:p>
+          <a:p>
+            <a:endParaRPr lang="en-US" dirty="0"/>
+          </a:p>
+        </p:txBody>
+      </p:sp>
+      <p:sp>
+        <p:nvSpPr>
+          <p:cNvPr id="4" name="Slide Number Placeholder 3">
+            <a:extLst>
+              <a:ext uri="{FF2B5EF4-FFF2-40B4-BE49-F238E27FC236}">
+                <a16:creationId xmlns:a16="http://schemas.microsoft.com/office/drawing/2014/main" id="{368C0B2C-82B9-FC3F-155A-F1CD7AEE5DC1}"/>
+              </a:ext>
+            </a:extLst>
+          </p:cNvPr>
+          <p:cNvSpPr>
+            <a:spLocks noGrp="1"/>
+          </p:cNvSpPr>
+          <p:nvPr>
+            <p:ph type="sldNum" sz="quarter" idx="12"/>
+          </p:nvPr>
+        </p:nvSpPr>
+        <p:spPr/>
+        <p:txBody>
+          <a:bodyPr/>
+          <a:lstStyle/>
+          <a:p>
+            <a:fld id="{9F39E346-B1F3-4075-BD67-234EF0F10AC6}" type="slidenum">
+              <a:rPr lang="et-EE" smtClean="0"/>
+              <a:pPr/>
+              <a:t>4</a:t>
+            </a:fld>
+            <a:endParaRPr lang="et-EE" dirty="0"/>
+          </a:p>
+        </p:txBody>
+      </p:sp>
+      <p:pic>
+        <p:nvPicPr>
+          <p:cNvPr id="8" name="Picture 7" descr="A blueprint of a house&#10;&#10;AI-generated content may be incorrect.">
+            <a:extLst>
+              <a:ext uri="{FF2B5EF4-FFF2-40B4-BE49-F238E27FC236}">
+                <a16:creationId xmlns:a16="http://schemas.microsoft.com/office/drawing/2014/main" id="{360574CF-300E-6307-18CC-9A4CBD48EB15}"/>
+              </a:ext>
+            </a:extLst>
+          </p:cNvPr>
+          <p:cNvPicPr>
+            <a:picLocks noChangeAspect="1"/>
+          </p:cNvPicPr>
+          <p:nvPr/>
+        </p:nvPicPr>
+        <p:blipFill>
+          <a:blip r:embed="rId2">
+            <a:extLst>
+              <a:ext uri="{28A0092B-C50C-407E-A947-70E740481C1C}">
+                <a14:useLocalDpi xmlns:a14="http://schemas.microsoft.com/office/drawing/2010/main" val="0"/>
+              </a:ext>
+            </a:extLst>
+          </a:blip>
+          <a:stretch>
+            <a:fillRect/>
+          </a:stretch>
+        </p:blipFill>
+        <p:spPr>
+          <a:xfrm>
+            <a:off x="3722368" y="2488975"/>
+            <a:ext cx="8128418" cy="4369025"/>
+          </a:xfrm>
+          <a:prstGeom prst="rect">
+            <a:avLst/>
+          </a:prstGeom>
+        </p:spPr>
+      </p:pic>
+      <p:sp>
+        <p:nvSpPr>
+          <p:cNvPr id="9" name="Rectangle 8">
+            <a:extLst>
+              <a:ext uri="{FF2B5EF4-FFF2-40B4-BE49-F238E27FC236}">
+                <a16:creationId xmlns:a16="http://schemas.microsoft.com/office/drawing/2014/main" id="{6DCDB93C-67D6-0EDF-FA02-0B3A1FE4AAEF}"/>
+              </a:ext>
+            </a:extLst>
+          </p:cNvPr>
+          <p:cNvSpPr/>
+          <p:nvPr/>
+        </p:nvSpPr>
+        <p:spPr>
+          <a:xfrm>
+            <a:off x="5667270" y="4099727"/>
+            <a:ext cx="1637882" cy="974691"/>
+          </a:xfrm>
+          <a:prstGeom prst="rect">
+            <a:avLst/>
+          </a:prstGeom>
+        </p:spPr>
+        <p:style>
+          <a:lnRef idx="2">
+            <a:schemeClr val="accent1">
+              <a:shade val="15000"/>
+            </a:schemeClr>
+          </a:lnRef>
+          <a:fillRef idx="1">
+            <a:schemeClr val="accent1"/>
+          </a:fillRef>
+          <a:effectRef idx="0">
+            <a:schemeClr val="accent1"/>
+          </a:effectRef>
+          <a:fontRef idx="minor">
+            <a:schemeClr val="lt1"/>
+          </a:fontRef>
+        </p:style>
+        <p:txBody>
+          <a:bodyPr rtlCol="0" anchor="ctr"/>
+          <a:lstStyle/>
+          <a:p>
+            <a:pPr algn="ctr"/>
+            <a:r>
+              <a:rPr lang="en-US" sz="2800" b="1" dirty="0">
+                <a:solidFill>
+                  <a:srgbClr val="667982"/>
+                </a:solidFill>
+              </a:rPr>
+              <a:t>T1220C</a:t>
+            </a:r>
+            <a:endParaRPr lang="et-EE" sz="2800" b="1" dirty="0">
+              <a:solidFill>
+                <a:srgbClr val="667982"/>
+              </a:solidFill>
+            </a:endParaRPr>
+          </a:p>
+        </p:txBody>
+      </p:sp>
+    </p:spTree>
+    <p:extLst>
+      <p:ext uri="{BB962C8B-B14F-4D97-AF65-F5344CB8AC3E}">
+        <p14:creationId xmlns:p14="http://schemas.microsoft.com/office/powerpoint/2010/main" val="822665558"/>
+      </p:ext>
+    </p:extLst>
+  </p:cSld>
+  <p:clrMapOvr>
+    <a:masterClrMapping/>
+  </p:clrMapOvr>
+</p:sld>
 </file>
 
 <file path=ppt/theme/theme1.xml><?xml version="1.0" encoding="utf-8"?>
